--- a/2-SARF_INTRO/2-SARF-for-Clinicians.pptx
+++ b/2-SARF_INTRO/2-SARF-for-Clinicians.pptx
@@ -163,7 +163,7 @@
           <a:bodyPr vert="horz" lIns="91440" tIns="45720" rIns="91440" bIns="45720" rtlCol="0"/>
           <a:lstStyle>
             <a:lvl1pPr algn="l">
-              <a:defRPr sz="1200"/>
+              <a:defRPr sz="4200"/>
             </a:lvl1pPr>
           </a:lstStyle>
           <a:p>
@@ -194,7 +194,7 @@
           <a:bodyPr vert="horz" lIns="91440" tIns="45720" rIns="91440" bIns="45720" rtlCol="0"/>
           <a:lstStyle>
             <a:lvl1pPr algn="r">
-              <a:defRPr sz="1200"/>
+              <a:defRPr sz="4200"/>
             </a:lvl1pPr>
           </a:lstStyle>
           <a:p>
@@ -321,7 +321,7 @@
           <a:bodyPr vert="horz" lIns="91440" tIns="45720" rIns="91440" bIns="45720" rtlCol="0" anchor="b"/>
           <a:lstStyle>
             <a:lvl1pPr algn="l">
-              <a:defRPr sz="1200"/>
+              <a:defRPr sz="4200"/>
             </a:lvl1pPr>
           </a:lstStyle>
           <a:p>
@@ -352,7 +352,7 @@
           <a:bodyPr vert="horz" lIns="91440" tIns="45720" rIns="91440" bIns="45720" rtlCol="0" anchor="b"/>
           <a:lstStyle>
             <a:lvl1pPr algn="r">
-              <a:defRPr sz="1200"/>
+              <a:defRPr sz="4200"/>
             </a:lvl1pPr>
           </a:lstStyle>
           <a:p>
@@ -374,7 +374,7 @@
   <p:clrMap bg1="lt1" tx1="dk1" bg2="lt2" tx2="dk2" accent1="accent1" accent2="accent2" accent3="accent3" accent4="accent4" accent5="accent5" accent6="accent6" hlink="hlink" folHlink="folHlink"/>
   <p:notesStyle>
     <a:lvl1pPr marL="0" algn="l" defTabSz="914400" rtl="0" eaLnBrk="1" latinLnBrk="0" hangingPunct="1">
-      <a:defRPr sz="1200" kern="1200">
+      <a:defRPr sz="4200" kern="1200">
         <a:solidFill>
           <a:schemeClr val="tx1"/>
         </a:solidFill>
@@ -384,7 +384,7 @@
       </a:defRPr>
     </a:lvl1pPr>
     <a:lvl2pPr marL="457200" algn="l" defTabSz="914400" rtl="0" eaLnBrk="1" latinLnBrk="0" hangingPunct="1">
-      <a:defRPr sz="1200" kern="1200">
+      <a:defRPr sz="4200" kern="1200">
         <a:solidFill>
           <a:schemeClr val="tx1"/>
         </a:solidFill>
@@ -394,7 +394,7 @@
       </a:defRPr>
     </a:lvl2pPr>
     <a:lvl3pPr marL="914400" algn="l" defTabSz="914400" rtl="0" eaLnBrk="1" latinLnBrk="0" hangingPunct="1">
-      <a:defRPr sz="1200" kern="1200">
+      <a:defRPr sz="4200" kern="1200">
         <a:solidFill>
           <a:schemeClr val="tx1"/>
         </a:solidFill>
@@ -404,7 +404,7 @@
       </a:defRPr>
     </a:lvl3pPr>
     <a:lvl4pPr marL="1371600" algn="l" defTabSz="914400" rtl="0" eaLnBrk="1" latinLnBrk="0" hangingPunct="1">
-      <a:defRPr sz="1200" kern="1200">
+      <a:defRPr sz="4200" kern="1200">
         <a:solidFill>
           <a:schemeClr val="tx1"/>
         </a:solidFill>
@@ -414,7 +414,7 @@
       </a:defRPr>
     </a:lvl4pPr>
     <a:lvl5pPr marL="1828800" algn="l" defTabSz="914400" rtl="0" eaLnBrk="1" latinLnBrk="0" hangingPunct="1">
-      <a:defRPr sz="1200" kern="1200">
+      <a:defRPr sz="4200" kern="1200">
         <a:solidFill>
           <a:schemeClr val="tx1"/>
         </a:solidFill>
@@ -424,7 +424,7 @@
       </a:defRPr>
     </a:lvl5pPr>
     <a:lvl6pPr marL="2286000" algn="l" defTabSz="914400" rtl="0" eaLnBrk="1" latinLnBrk="0" hangingPunct="1">
-      <a:defRPr sz="1200" kern="1200">
+      <a:defRPr sz="4200" kern="1200">
         <a:solidFill>
           <a:schemeClr val="tx1"/>
         </a:solidFill>
@@ -434,7 +434,7 @@
       </a:defRPr>
     </a:lvl6pPr>
     <a:lvl7pPr marL="2743200" algn="l" defTabSz="914400" rtl="0" eaLnBrk="1" latinLnBrk="0" hangingPunct="1">
-      <a:defRPr sz="1200" kern="1200">
+      <a:defRPr sz="4200" kern="1200">
         <a:solidFill>
           <a:schemeClr val="tx1"/>
         </a:solidFill>
@@ -444,7 +444,7 @@
       </a:defRPr>
     </a:lvl7pPr>
     <a:lvl8pPr marL="3200400" algn="l" defTabSz="914400" rtl="0" eaLnBrk="1" latinLnBrk="0" hangingPunct="1">
-      <a:defRPr sz="1200" kern="1200">
+      <a:defRPr sz="4200" kern="1200">
         <a:solidFill>
           <a:schemeClr val="tx1"/>
         </a:solidFill>
@@ -454,7 +454,7 @@
       </a:defRPr>
     </a:lvl8pPr>
     <a:lvl9pPr marL="3657600" algn="l" defTabSz="914400" rtl="0" eaLnBrk="1" latinLnBrk="0" hangingPunct="1">
-      <a:defRPr sz="1200" kern="1200">
+      <a:defRPr sz="4200" kern="1200">
         <a:solidFill>
           <a:schemeClr val="tx1"/>
         </a:solidFill>
@@ -512,10 +512,27 @@
           <a:lstStyle/>
           <a:p>
             <a:r>
-              <a:rPr lang="en-US" dirty="0"/>
-              <a:t/>
-            </a:r>
-            <a:endParaRPr lang="en-US" dirty="0"/>
+              <a:rPr sz="4200"/>
+              <a:t>TITLE SLIDE</a:t>
+            </a:r>
+          </a:p>
+          <a:p>
+            <a:r>
+              <a:rPr sz="4200"/>
+              <a:t>"SARF for Clinicians: A Minimal Framework for Family-Level Patterns"</a:t>
+            </a:r>
+          </a:p>
+          <a:p>
+            <a:r>
+              <a:rPr sz="4200"/>
+              <a:t>Presentation 2 of 5. Duration: ~25 minutes (leaves 5 min for questions).</a:t>
+            </a:r>
+          </a:p>
+          <a:p>
+            <a:r>
+              <a:rPr sz="4200"/>
+              <a:t>Follows Presentation 1 which covered scientific problems and why measurement matters.</a:t>
+            </a:r>
           </a:p>
         </p:txBody>
       </p:sp>
@@ -600,10 +617,64 @@
           <a:lstStyle/>
           <a:p>
             <a:r>
-              <a:rPr lang="en-US" dirty="0"/>
-              <a:t/>
-            </a:r>
-            <a:endParaRPr lang="en-US" dirty="0"/>
+              <a:rPr sz="4200"/>
+              <a:t>THE TIMELINE METHOD: HOW YOU COLLECT THIS (4 min)</a:t>
+            </a:r>
+          </a:p>
+          <a:p>
+            <a:r>
+              <a:rPr sz="4200"/>
+              <a:t>You already do intakes. This is about what you're looking for.</a:t>
+            </a:r>
+          </a:p>
+          <a:p>
+            <a:r>
+              <a:rPr sz="4200"/>
+              <a:t>1. When did the symptom start? Get a date, not a narrative.</a:t>
+            </a:r>
+          </a:p>
+          <a:p>
+            <a:r>
+              <a:rPr sz="4200"/>
+              <a:t>2. What was happening in relationships at that time? Look for R shifts.</a:t>
+            </a:r>
+          </a:p>
+          <a:p>
+            <a:r>
+              <a:rPr sz="4200"/>
+              <a:t>3. Plot S, A, and R on a timeline. Do the shifts correlate?</a:t>
+            </a:r>
+          </a:p>
+          <a:p>
+            <a:r>
+              <a:rPr sz="4200"/>
+              <a:t>4. Rule out: Can you rule out A and R as factors in S? If not, that's your clinical territory.</a:t>
+            </a:r>
+          </a:p>
+          <a:p/>
+          <a:p>
+            <a:r>
+              <a:rPr sz="4200"/>
+              <a:t>THE REALITY:</a:t>
+            </a:r>
+          </a:p>
+          <a:p>
+            <a:r>
+              <a:rPr sz="4200"/>
+              <a:t>This usually takes a handful of sessions with a trained person. Not a one-intake exercise.</a:t>
+            </a:r>
+          </a:p>
+          <a:p>
+            <a:r>
+              <a:rPr sz="4200"/>
+              <a:t>It helps—might even be mandatory—for the client to be on board from the start.</a:t>
+            </a:r>
+          </a:p>
+          <a:p>
+            <a:r>
+              <a:rPr sz="4200"/>
+              <a:t>Anxiety impairs the very cognition needed to report accurately. Skilled interviewing required.</a:t>
+            </a:r>
           </a:p>
         </p:txBody>
       </p:sp>
@@ -688,10 +759,27 @@
           <a:lstStyle/>
           <a:p>
             <a:r>
-              <a:rPr lang="en-US" dirty="0"/>
-              <a:t/>
-            </a:r>
-            <a:endParaRPr lang="en-US" dirty="0"/>
+              <a:rPr sz="4200"/>
+              <a:t>TOOLS: WHERE THIS IS GOING (3 min)</a:t>
+            </a:r>
+          </a:p>
+          <a:p>
+            <a:r>
+              <a:rPr sz="4200"/>
+              <a:t>Family Diagram "Pro" App (released): SARF variables built in, timeline and diagram visualization. Designed for clinicians tracking cases over time.</a:t>
+            </a:r>
+          </a:p>
+          <a:p>
+            <a:r>
+              <a:rPr sz="4200"/>
+              <a:t>"Personal" AI Intake App (in development): AI chatbot walks someone through their own timeline and family diagram. Makes data collection accessible to anyone.</a:t>
+            </a:r>
+          </a:p>
+          <a:p>
+            <a:r>
+              <a:rPr sz="4200"/>
+              <a:t>Inter-Rater Reliability Study (R&amp;D): Can domain experts agree on SARF coding of the same case? If yes → train AI to auto-code. Path from clinical observation to testable science.</a:t>
+            </a:r>
           </a:p>
         </p:txBody>
       </p:sp>
@@ -776,10 +864,59 @@
           <a:lstStyle/>
           <a:p>
             <a:r>
-              <a:rPr lang="en-US" dirty="0"/>
-              <a:t/>
-            </a:r>
-            <a:endParaRPr lang="en-US" dirty="0"/>
+              <a:rPr sz="4200"/>
+              <a:t>CLOSE (2 min)</a:t>
+            </a:r>
+          </a:p>
+          <a:p>
+            <a:r>
+              <a:rPr sz="4200"/>
+              <a:t>SARF gives us common variables. Common variables let us coordinate. Coordination lets us do real research.</a:t>
+            </a:r>
+          </a:p>
+          <a:p>
+            <a:r>
+              <a:rPr sz="4200"/>
+              <a:t>Real research could finally test whether relationships impact symptoms the way we think they do.</a:t>
+            </a:r>
+          </a:p>
+          <a:p/>
+          <a:p>
+            <a:r>
+              <a:rPr sz="4200"/>
+              <a:t>"Before your next intake: Ask when the symptom started. Ask what was happening in relationships at that time. Track R, A, S, and F. See what you find."</a:t>
+            </a:r>
+          </a:p>
+          <a:p/>
+          <a:p>
+            <a:r>
+              <a:rPr sz="4200"/>
+              <a:t>BUMPER STICKERS:</a:t>
+            </a:r>
+          </a:p>
+          <a:p>
+            <a:r>
+              <a:rPr sz="4200"/>
+              <a:t>- "The symptom is in the system, not the individual"</a:t>
+            </a:r>
+          </a:p>
+          <a:p>
+            <a:r>
+              <a:rPr sz="4200"/>
+              <a:t>- "Anxiety = perceived uncertainty + urgency"</a:t>
+            </a:r>
+          </a:p>
+          <a:p>
+            <a:r>
+              <a:rPr sz="4200"/>
+              <a:t>- "Function up"</a:t>
+            </a:r>
+          </a:p>
+          <a:p>
+            <a:r>
+              <a:rPr sz="4200"/>
+              <a:t>- "R → A → S"</a:t>
+            </a:r>
           </a:p>
         </p:txBody>
       </p:sp>
@@ -864,10 +1001,45 @@
           <a:lstStyle/>
           <a:p>
             <a:r>
-              <a:rPr lang="en-US" dirty="0"/>
-              <a:t/>
-            </a:r>
-            <a:endParaRPr lang="en-US" dirty="0"/>
+              <a:rPr sz="4200"/>
+              <a:t>HOOK: A CASE (2 min)</a:t>
+            </a:r>
+          </a:p>
+          <a:p>
+            <a:r>
+              <a:rPr sz="4200"/>
+              <a:t>Mother brings daughter in. "She bites her nails. It's always been there."</a:t>
+            </a:r>
+          </a:p>
+          <a:p>
+            <a:r>
+              <a:rPr sz="4200"/>
+              <a:t>The nursing trainees want to treat the pain—bandage the fingers, maybe anxiety meds.</a:t>
+            </a:r>
+          </a:p>
+          <a:p>
+            <a:r>
+              <a:rPr sz="4200"/>
+              <a:t>I asked one question: "When did it start?"</a:t>
+            </a:r>
+          </a:p>
+          <a:p>
+            <a:r>
+              <a:rPr sz="4200"/>
+              <a:t>Mother: "Well... it was when her boyfriend left."</a:t>
+            </a:r>
+          </a:p>
+          <a:p>
+            <a:r>
+              <a:rPr sz="4200"/>
+              <a:t>Two sessions later, the symptom was gone. Mother forgot it ever existed.</a:t>
+            </a:r>
+          </a:p>
+          <a:p>
+            <a:r>
+              <a:rPr sz="4200"/>
+              <a:t>"How? I'll come back to this."</a:t>
+            </a:r>
           </a:p>
         </p:txBody>
       </p:sp>
@@ -952,10 +1124,27 @@
           <a:lstStyle/>
           <a:p>
             <a:r>
-              <a:rPr lang="en-US" dirty="0"/>
-              <a:t/>
-            </a:r>
-            <a:endParaRPr lang="en-US" dirty="0"/>
+              <a:rPr sz="4200"/>
+              <a:t>BRIDGE FROM PRESENTATION 1 (1 min)</a:t>
+            </a:r>
+          </a:p>
+          <a:p>
+            <a:r>
+              <a:rPr sz="4200"/>
+              <a:t>We just talked about why measurement matters and where the field's implicit model breaks down.</a:t>
+            </a:r>
+          </a:p>
+          <a:p>
+            <a:r>
+              <a:rPr sz="4200"/>
+              <a:t>Now the question: if not "what's wrong with this person," then what do we actually track?</a:t>
+            </a:r>
+          </a:p>
+          <a:p>
+            <a:r>
+              <a:rPr sz="4200"/>
+              <a:t>SARF is the minimum answer to that question.</a:t>
+            </a:r>
           </a:p>
         </p:txBody>
       </p:sp>
@@ -1040,10 +1229,27 @@
           <a:lstStyle/>
           <a:p>
             <a:r>
-              <a:rPr lang="en-US" dirty="0"/>
-              <a:t/>
-            </a:r>
-            <a:endParaRPr lang="en-US" dirty="0"/>
+              <a:rPr sz="4200"/>
+              <a:t>THE PIPELINE: R → A → S (setup for the four variables)</a:t>
+            </a:r>
+          </a:p>
+          <a:p>
+            <a:r>
+              <a:rPr sz="4200"/>
+              <a:t>Relationship shifts drive Anxiety which drives Symptoms. Functioning is the lever.</a:t>
+            </a:r>
+          </a:p>
+          <a:p>
+            <a:r>
+              <a:rPr sz="4200"/>
+              <a:t>Instead of asking "what's wrong with this person?", ask "what's happening in their relationships, and how is that showing up as symptoms?"</a:t>
+            </a:r>
+          </a:p>
+          <a:p>
+            <a:r>
+              <a:rPr sz="4200"/>
+              <a:t>"Automatic" means driven by an evolutionarily older behavioral model. Not chosen. Not deliberate. Short-term motivated.</a:t>
+            </a:r>
           </a:p>
         </p:txBody>
       </p:sp>
@@ -1128,10 +1334,21 @@
           <a:lstStyle/>
           <a:p>
             <a:r>
-              <a:rPr lang="en-US" dirty="0"/>
-              <a:t/>
-            </a:r>
-            <a:endParaRPr lang="en-US" dirty="0"/>
+              <a:rPr sz="4200"/>
+              <a:t>S: SYMPTOM</a:t>
+            </a:r>
+          </a:p>
+          <a:p>
+            <a:r>
+              <a:rPr sz="4200"/>
+              <a:t>Whatever brings them in. Mental health, behavioral, emotional, physical.</a:t>
+            </a:r>
+          </a:p>
+          <a:p>
+            <a:r>
+              <a:rPr sz="4200"/>
+              <a:t>Track: up, down, same.</a:t>
+            </a:r>
           </a:p>
         </p:txBody>
       </p:sp>
@@ -1216,10 +1433,39 @@
           <a:lstStyle/>
           <a:p>
             <a:r>
-              <a:rPr lang="en-US" dirty="0"/>
-              <a:t/>
-            </a:r>
-            <a:endParaRPr lang="en-US" dirty="0"/>
+              <a:rPr sz="4200"/>
+              <a:t>A: ANXIETY</a:t>
+            </a:r>
+          </a:p>
+          <a:p>
+            <a:r>
+              <a:rPr sz="4200"/>
+              <a:t>NOT "feeling stressed." Anxiety = perceived uncertainty + urgency.</a:t>
+            </a:r>
+          </a:p>
+          <a:p>
+            <a:r>
+              <a:rPr sz="4200"/>
+              <a:t>When anxious, people search for anything to reduce uncertainty.</a:t>
+            </a:r>
+          </a:p>
+          <a:p>
+            <a:r>
+              <a:rPr sz="4200"/>
+              <a:t>Thinking degrades as anxiety rises—they jump topics, contradict themselves, can't answer direct questions.</a:t>
+            </a:r>
+          </a:p>
+          <a:p>
+            <a:r>
+              <a:rPr sz="4200"/>
+              <a:t>The search stops when a "solution" is found—whether the problem is actually solved or not.</a:t>
+            </a:r>
+          </a:p>
+          <a:p>
+            <a:r>
+              <a:rPr sz="4200"/>
+              <a:t>Track: up, down, same.</a:t>
+            </a:r>
           </a:p>
         </p:txBody>
       </p:sp>
@@ -1304,10 +1550,63 @@
           <a:lstStyle/>
           <a:p>
             <a:r>
-              <a:rPr lang="en-US" dirty="0"/>
-              <a:t/>
-            </a:r>
-            <a:endParaRPr lang="en-US" dirty="0"/>
+              <a:rPr sz="4200"/>
+              <a:t>R: RELATIONSHIP</a:t>
+            </a:r>
+          </a:p>
+          <a:p>
+            <a:r>
+              <a:rPr sz="4200"/>
+              <a:t>The automatic moves people make toward/away from each other:</a:t>
+            </a:r>
+          </a:p>
+          <a:p>
+            <a:r>
+              <a:rPr sz="4200"/>
+              <a:t>- Conflict: fighting, overt tension</a:t>
+            </a:r>
+          </a:p>
+          <a:p>
+            <a:r>
+              <a:rPr sz="4200"/>
+              <a:t>- Distance: withdrawal, avoidance</a:t>
+            </a:r>
+          </a:p>
+          <a:p>
+            <a:r>
+              <a:rPr sz="4200"/>
+              <a:t>- Over/under-functioning: one does more, one does less</a:t>
+            </a:r>
+          </a:p>
+          <a:p>
+            <a:r>
+              <a:rPr sz="4200"/>
+              <a:t>- Child-focus: anxiety channeled into worry about a kid</a:t>
+            </a:r>
+          </a:p>
+          <a:p>
+            <a:r>
+              <a:rPr sz="4200"/>
+              <a:t>- Cutoff: severing contact</a:t>
+            </a:r>
+          </a:p>
+          <a:p>
+            <a:r>
+              <a:rPr sz="4200"/>
+              <a:t>- Triangle: pulling in a third party to stabilize</a:t>
+            </a:r>
+          </a:p>
+          <a:p>
+            <a:r>
+              <a:rPr sz="4200"/>
+              <a:t>And the sophisticated option:</a:t>
+            </a:r>
+          </a:p>
+          <a:p>
+            <a:r>
+              <a:rPr sz="4200"/>
+              <a:t>- Define self: taking a position while staying connected (requires higher F)</a:t>
+            </a:r>
           </a:p>
         </p:txBody>
       </p:sp>
@@ -1392,10 +1691,39 @@
           <a:lstStyle/>
           <a:p>
             <a:r>
-              <a:rPr lang="en-US" dirty="0"/>
-              <a:t/>
-            </a:r>
-            <a:endParaRPr lang="en-US" dirty="0"/>
+              <a:rPr sz="4200"/>
+              <a:t>F: FUNCTIONING</a:t>
+            </a:r>
+          </a:p>
+          <a:p>
+            <a:r>
+              <a:rPr sz="4200"/>
+              <a:t>How well someone balances emotion and thinking toward their goals (goals defined at their calmest).</a:t>
+            </a:r>
+          </a:p>
+          <a:p>
+            <a:r>
+              <a:rPr sz="4200"/>
+              <a:t>Low F: ruled by emotion, can't plan, can't see forest for trees.</a:t>
+            </a:r>
+          </a:p>
+          <a:p>
+            <a:r>
+              <a:rPr sz="4200"/>
+              <a:t>High F: can pause, think long-term, update their approach.</a:t>
+            </a:r>
+          </a:p>
+          <a:p>
+            <a:r>
+              <a:rPr sz="4200"/>
+              <a:t>Clinical goal: "function up."</a:t>
+            </a:r>
+          </a:p>
+          <a:p>
+            <a:r>
+              <a:rPr sz="4200"/>
+              <a:t>F is the independent variable—higher F buffers the impact of R and A on S.</a:t>
+            </a:r>
           </a:p>
         </p:txBody>
       </p:sp>
@@ -1480,10 +1808,65 @@
           <a:lstStyle/>
           <a:p>
             <a:r>
-              <a:rPr lang="en-US" dirty="0"/>
-              <a:t/>
-            </a:r>
-            <a:endParaRPr lang="en-US" dirty="0"/>
+              <a:rPr sz="4200"/>
+              <a:t>BACK TO THE CASE: SARF APPLIED (5 min)</a:t>
+            </a:r>
+          </a:p>
+          <a:p>
+            <a:r>
+              <a:rPr sz="4200"/>
+              <a:t>S (Symptom): Nail-biting in daughter.</a:t>
+            </a:r>
+          </a:p>
+          <a:p>
+            <a:r>
+              <a:rPr sz="4200"/>
+              <a:t>R (Relationship): Boyfriend fled → Mother's relationship system destabilized.</a:t>
+            </a:r>
+          </a:p>
+          <a:p>
+            <a:r>
+              <a:rPr sz="4200"/>
+              <a:t>A (Anxiety): Mother's anxiety spiked (uncertainty + urgency).</a:t>
+            </a:r>
+          </a:p>
+          <a:p>
+            <a:r>
+              <a:rPr sz="4200"/>
+              <a:t>S (Symptom): Daughter's nail-biting started at the same time.</a:t>
+            </a:r>
+          </a:p>
+          <a:p/>
+          <a:p>
+            <a:r>
+              <a:rPr sz="4200"/>
+              <a:t>The standard implicit model: Problem is in the daughter. Locate it. Fix it.</a:t>
+            </a:r>
+          </a:p>
+          <a:p>
+            <a:r>
+              <a:rPr sz="4200"/>
+              <a:t>The SARF model: R → A → S. The mother's relationship shift drove her anxiety, which showed up as symptoms in the daughter.</a:t>
+            </a:r>
+          </a:p>
+          <a:p>
+            <a:r>
+              <a:rPr sz="4200"/>
+              <a:t>Intervention: Work on mother's F (functioning).</a:t>
+            </a:r>
+          </a:p>
+          <a:p>
+            <a:r>
+              <a:rPr sz="4200"/>
+              <a:t>Outcome: Two sessions. Symptom remission. Mother forgot it existed.</a:t>
+            </a:r>
+          </a:p>
+          <a:p/>
+          <a:p>
+            <a:r>
+              <a:rPr sz="4200"/>
+              <a:t>The blade of grass: The daughter's nail-biting was like a blade of grass bending in the wind. The wind was in the mother's relationship system.</a:t>
+            </a:r>
           </a:p>
         </p:txBody>
       </p:sp>
